--- a/01-intro.pptx
+++ b/01-intro.pptx
@@ -1124,8 +1124,8 @@
   <dgm:cxnLst>
     <dgm:cxn modelId="{4D8AAB05-F934-6646-B163-AFB042378FF4}" type="presOf" srcId="{3F6EDC6D-23EC-AC48-9ED3-FDF64FFAC31D}" destId="{2D87A2D4-5EF1-3C44-BAB4-2E8AB1FE47EA}" srcOrd="0" destOrd="0" presId="urn:microsoft.com/office/officeart/2009/layout/CircleArrowProcess"/>
     <dgm:cxn modelId="{0F4B4E3D-58F4-604B-B352-48470EDA364D}" type="presOf" srcId="{67CB26A5-C6DC-474C-96C6-587571AFCC3F}" destId="{181DA050-2B95-8644-8C8A-6D0DA7FFFC37}" srcOrd="0" destOrd="0" presId="urn:microsoft.com/office/officeart/2009/layout/CircleArrowProcess"/>
+    <dgm:cxn modelId="{7350FE46-D29B-1448-A9E5-F22D4A7D5AFC}" srcId="{67CB26A5-C6DC-474C-96C6-587571AFCC3F}" destId="{F6FBA3CF-96D2-4046-A923-6251710AC3D4}" srcOrd="0" destOrd="0" parTransId="{5A590DBB-6CB6-034A-BD72-A59CCAAD3930}" sibTransId="{3AEBF18B-3389-2648-81D2-584CC6D6A5A7}"/>
     <dgm:cxn modelId="{ADD3F864-1457-B94D-A315-E56710781834}" type="presOf" srcId="{F6FBA3CF-96D2-4046-A923-6251710AC3D4}" destId="{CA672D27-EE07-AB4E-8206-23B491B0F2F0}" srcOrd="0" destOrd="0" presId="urn:microsoft.com/office/officeart/2009/layout/CircleArrowProcess"/>
-    <dgm:cxn modelId="{7350FE46-D29B-1448-A9E5-F22D4A7D5AFC}" srcId="{67CB26A5-C6DC-474C-96C6-587571AFCC3F}" destId="{F6FBA3CF-96D2-4046-A923-6251710AC3D4}" srcOrd="0" destOrd="0" parTransId="{5A590DBB-6CB6-034A-BD72-A59CCAAD3930}" sibTransId="{3AEBF18B-3389-2648-81D2-584CC6D6A5A7}"/>
     <dgm:cxn modelId="{473B338E-B068-794D-A7ED-BE6FF49C916D}" type="presOf" srcId="{741E21FF-9756-C74E-912B-71FC58C654AD}" destId="{8249A872-561A-0C48-BF9E-CCB343D67295}" srcOrd="0" destOrd="0" presId="urn:microsoft.com/office/officeart/2009/layout/CircleArrowProcess"/>
     <dgm:cxn modelId="{675E72C0-F766-7C45-BC72-9321020D79E7}" srcId="{67CB26A5-C6DC-474C-96C6-587571AFCC3F}" destId="{741E21FF-9756-C74E-912B-71FC58C654AD}" srcOrd="2" destOrd="0" parTransId="{1AC6AE72-8255-BC4D-BA5D-99D0DC88105C}" sibTransId="{0AC1AAD9-3DE7-4840-8615-4D0D4F02433B}"/>
     <dgm:cxn modelId="{1B80ADDC-F16F-D14A-805D-1A5BBBFCF18B}" srcId="{67CB26A5-C6DC-474C-96C6-587571AFCC3F}" destId="{3F6EDC6D-23EC-AC48-9ED3-FDF64FFAC31D}" srcOrd="1" destOrd="0" parTransId="{86CAE1CF-F488-364F-9220-94D72E6C28D2}" sibTransId="{72C2F2B8-34BC-3C4F-B20E-4CB3162377D7}"/>
@@ -4706,7 +4706,7 @@
               <a:rPr lang="en-US" smtClean="0">
                 <a:latin typeface="Segoe UI" pitchFamily="34" charset="0"/>
               </a:rPr>
-              <a:t>11/20/2022 9:19 AM</a:t>
+              <a:t>5/26/26 3:18 PM</a:t>
             </a:fld>
             <a:endParaRPr lang="en-US" dirty="0">
               <a:latin typeface="Segoe UI" pitchFamily="34" charset="0"/>
@@ -5003,7 +5003,7 @@
           <a:p>
             <a:fld id="{D18B56EA-E28F-4F92-9F16-7A6F2501B303}" type="datetime8">
               <a:rPr lang="en-US" smtClean="0"/>
-              <a:t>11/20/2022 9:19 AM</a:t>
+              <a:t>5/26/26 2:24 PM</a:t>
             </a:fld>
             <a:endParaRPr lang="en-US" dirty="0"/>
           </a:p>
@@ -5386,7 +5386,7 @@
           <a:p>
             <a:fld id="{D18B56EA-E28F-4F92-9F16-7A6F2501B303}" type="datetime8">
               <a:rPr lang="en-US" smtClean="0"/>
-              <a:t>11/20/2022 9:19 AM</a:t>
+              <a:t>5/26/26 2:24 PM</a:t>
             </a:fld>
             <a:endParaRPr lang="en-US" dirty="0"/>
           </a:p>
@@ -5567,7 +5567,7 @@
           <a:p>
             <a:fld id="{D18B56EA-E28F-4F92-9F16-7A6F2501B303}" type="datetime8">
               <a:rPr lang="en-US" smtClean="0"/>
-              <a:t>11/20/2022 9:19 AM</a:t>
+              <a:t>5/26/26 2:24 PM</a:t>
             </a:fld>
             <a:endParaRPr lang="en-US" dirty="0"/>
           </a:p>
@@ -5748,7 +5748,7 @@
           <a:p>
             <a:fld id="{D18B56EA-E28F-4F92-9F16-7A6F2501B303}" type="datetime8">
               <a:rPr lang="en-US" smtClean="0"/>
-              <a:t>11/20/2022 9:19 AM</a:t>
+              <a:t>5/26/26 2:24 PM</a:t>
             </a:fld>
             <a:endParaRPr lang="en-US" dirty="0"/>
           </a:p>
@@ -5929,7 +5929,7 @@
           <a:p>
             <a:fld id="{D18B56EA-E28F-4F92-9F16-7A6F2501B303}" type="datetime8">
               <a:rPr lang="en-US" smtClean="0"/>
-              <a:t>11/20/2022 9:19 AM</a:t>
+              <a:t>5/26/26 2:24 PM</a:t>
             </a:fld>
             <a:endParaRPr lang="en-US" dirty="0"/>
           </a:p>
@@ -6110,7 +6110,7 @@
           <a:p>
             <a:fld id="{D18B56EA-E28F-4F92-9F16-7A6F2501B303}" type="datetime8">
               <a:rPr lang="en-US" smtClean="0"/>
-              <a:t>11/20/2022 9:19 AM</a:t>
+              <a:t>5/26/26 2:24 PM</a:t>
             </a:fld>
             <a:endParaRPr lang="en-US" dirty="0"/>
           </a:p>
@@ -6294,7 +6294,7 @@
           <a:p>
             <a:fld id="{D18B56EA-E28F-4F92-9F16-7A6F2501B303}" type="datetime8">
               <a:rPr lang="en-US" smtClean="0"/>
-              <a:t>11/20/2022 9:19 AM</a:t>
+              <a:t>5/26/26 2:24 PM</a:t>
             </a:fld>
             <a:endParaRPr lang="en-US" dirty="0"/>
           </a:p>
@@ -6499,7 +6499,7 @@
           <a:p>
             <a:fld id="{D18B56EA-E28F-4F92-9F16-7A6F2501B303}" type="datetime8">
               <a:rPr lang="en-US" smtClean="0"/>
-              <a:t>11/20/2022 9:19 AM</a:t>
+              <a:t>5/26/26 2:24 PM</a:t>
             </a:fld>
             <a:endParaRPr lang="en-US" dirty="0"/>
           </a:p>
@@ -6991,7 +6991,7 @@
           <a:p>
             <a:fld id="{D18B56EA-E28F-4F92-9F16-7A6F2501B303}" type="datetime8">
               <a:rPr lang="en-US" smtClean="0"/>
-              <a:t>11/20/2022 9:19 AM</a:t>
+              <a:t>5/26/26 2:24 PM</a:t>
             </a:fld>
             <a:endParaRPr lang="en-US" dirty="0"/>
           </a:p>
@@ -7364,7 +7364,7 @@
           <a:p>
             <a:fld id="{D18B56EA-E28F-4F92-9F16-7A6F2501B303}" type="datetime8">
               <a:rPr lang="en-US" smtClean="0"/>
-              <a:t>11/20/2022 9:19 AM</a:t>
+              <a:t>5/26/26 2:24 PM</a:t>
             </a:fld>
             <a:endParaRPr lang="en-US" dirty="0"/>
           </a:p>
@@ -7617,7 +7617,7 @@
           <a:p>
             <a:fld id="{D18B56EA-E28F-4F92-9F16-7A6F2501B303}" type="datetime8">
               <a:rPr lang="en-US" smtClean="0"/>
-              <a:t>11/20/2022 9:19 AM</a:t>
+              <a:t>5/26/26 2:24 PM</a:t>
             </a:fld>
             <a:endParaRPr lang="en-US" dirty="0"/>
           </a:p>
@@ -8075,7 +8075,7 @@
           <a:p>
             <a:fld id="{D18B56EA-E28F-4F92-9F16-7A6F2501B303}" type="datetime8">
               <a:rPr lang="en-US" smtClean="0"/>
-              <a:t>11/20/2022 9:19 AM</a:t>
+              <a:t>5/26/26 2:24 PM</a:t>
             </a:fld>
             <a:endParaRPr lang="en-US" dirty="0"/>
           </a:p>
@@ -8290,7 +8290,7 @@
           <a:p>
             <a:fld id="{D18B56EA-E28F-4F92-9F16-7A6F2501B303}" type="datetime8">
               <a:rPr lang="en-US" smtClean="0"/>
-              <a:t>11/20/2022 9:19 AM</a:t>
+              <a:t>5/26/26 2:24 PM</a:t>
             </a:fld>
             <a:endParaRPr lang="en-US" dirty="0"/>
           </a:p>
@@ -22271,10 +22271,10 @@
       </p:sp>
       <p:pic>
         <p:nvPicPr>
-          <p:cNvPr id="6" name="Picture 5" descr="Graphical user interface, text, application&#10;&#10;Description automatically generated">
+          <p:cNvPr id="5" name="Picture 4">
             <a:extLst>
               <a:ext uri="{FF2B5EF4-FFF2-40B4-BE49-F238E27FC236}">
-                <a16:creationId xmlns:a16="http://schemas.microsoft.com/office/drawing/2014/main" id="{E7F3D2CA-14C4-F2BE-EE5F-6DD412A524C7}"/>
+                <a16:creationId xmlns:a16="http://schemas.microsoft.com/office/drawing/2014/main" id="{747EE127-FE58-58A4-6DAD-436A4A91ED77}"/>
               </a:ext>
             </a:extLst>
           </p:cNvPr>
@@ -22291,8 +22291,8 @@
         </p:blipFill>
         <p:spPr>
           <a:xfrm>
-            <a:off x="827741" y="1315087"/>
-            <a:ext cx="3471543" cy="5257167"/>
+            <a:off x="902909" y="1446438"/>
+            <a:ext cx="4833615" cy="5059686"/>
           </a:xfrm>
           <a:prstGeom prst="rect">
             <a:avLst/>
@@ -27237,15 +27237,7 @@
             <a:pPr lvl="1"/>
             <a:r>
               <a:rPr lang="en-US" dirty="0"/>
-              <a:t>Access SharePoint REST API, Microsoft Graph, Azure AD-secured Endpoints… all straight from the </a:t>
-            </a:r>
-            <a:r>
-              <a:rPr lang="en-US" dirty="0" err="1"/>
-              <a:t>SPFx</a:t>
-            </a:r>
-            <a:r>
-              <a:rPr lang="en-US" dirty="0"/>
-              <a:t> API</a:t>
+              <a:t>Access SharePoint REST API, Microsoft Graph, Entra ID-secured Endpoints… all straight from the SPFx API</a:t>
             </a:r>
           </a:p>
         </p:txBody>
